--- a/content/decks/media-studies/media-studies-s1-lesson-06-a1-timed-media-language-analysis.pptx
+++ b/content/decks/media-studies/media-studies-s1-lesson-06-a1-timed-media-language-analysis.pptx
@@ -1217,7 +1217,7 @@
           <a:p>
             <a:r>
               <a:rPr lang="en-US" dirty="0"/>
-              <a:t>Not a photo of the exam, but of the attention it rewards: disciplined, systematic, unhurried reading.</a:t>
+              <a:t>The photograph shows the attention the exam rewards. Same order, no hurry, nothing skipped.</a:t>
             </a:r>
             <a:endParaRPr lang="en-US" dirty="0"/>
           </a:p>
@@ -4619,7 +4619,46 @@
       </p:sp>
       <p:sp>
         <p:nvSpPr>
-          <p:cNvPr id="10" name="Shape 8"/>
+          <p:cNvPr id="10" name="Text 8"/>
+          <p:cNvSpPr/>
+          <p:nvPr/>
+        </p:nvSpPr>
+        <p:spPr>
+          <a:xfrm>
+            <a:off x="822960" y="5532120"/>
+            <a:ext cx="10543032" cy="457200"/>
+          </a:xfrm>
+          <a:prstGeom prst="rect">
+            <a:avLst/>
+          </a:prstGeom>
+          <a:noFill/>
+          <a:ln/>
+        </p:spPr>
+        <p:txBody>
+          <a:bodyPr wrap="square" lIns="0" tIns="0" rIns="0" bIns="0" rtlCol="0" anchor="ctr"/>
+          <a:lstStyle/>
+          <a:p>
+            <a:pPr indent="0" marL="0">
+              <a:buNone/>
+            </a:pPr>
+            <a:r>
+              <a:rPr lang="en-US" sz="1200" i="1" dirty="0">
+                <a:solidFill>
+                  <a:srgbClr val="7A7F72"/>
+                </a:solidFill>
+                <a:latin typeface="Arial" pitchFamily="34" charset="0"/>
+                <a:ea typeface="Arial" pitchFamily="34" charset="-122"/>
+                <a:cs typeface="Arial" pitchFamily="34" charset="-120"/>
+              </a:rPr>
+              <a:t>Exit: Beat the Examiner, lite. One anonymized paragraph on screen, pairs call the band against the five criteria, teacher reveals.</a:t>
+            </a:r>
+            <a:endParaRPr lang="en-US" sz="1200" dirty="0"/>
+          </a:p>
+        </p:txBody>
+      </p:sp>
+      <p:sp>
+        <p:nvSpPr>
+          <p:cNvPr id="11" name="Shape 9"/>
           <p:cNvSpPr/>
           <p:nvPr/>
         </p:nvSpPr>
@@ -4642,7 +4681,7 @@
       </p:sp>
       <p:sp>
         <p:nvSpPr>
-          <p:cNvPr id="11" name="Text 9"/>
+          <p:cNvPr id="12" name="Text 10"/>
           <p:cNvSpPr/>
           <p:nvPr/>
         </p:nvSpPr>
@@ -4681,7 +4720,7 @@
       </p:sp>
       <p:sp>
         <p:nvSpPr>
-          <p:cNvPr id="12" name="Text 10"/>
+          <p:cNvPr id="13" name="Text 11"/>
           <p:cNvSpPr/>
           <p:nvPr/>
         </p:nvSpPr>
@@ -4745,7 +4784,7 @@
       </p:grpSpPr>
       <p:pic>
         <p:nvPicPr>
-          <p:cNvPr id="2" name="Image 0" descr="/private/tmp/claude-501/-Users-dogan-Documents-Vaults-Courses/a3a5132d-721f-4cd4-8ddd-e62e2b37b51b/scratchpad/img/crops/johnston-literature_a1777.jpg">    </p:cNvPr>
+          <p:cNvPr id="2" name="Image 0" descr="/Users/dogan/Documents/Vaults/Courses/wiki/classes/media-studies/decks/_build/img/crops/johnston-literature_a1777.jpg">    </p:cNvPr>
           <p:cNvPicPr>
             <a:picLocks noChangeAspect="1"/>
           </p:cNvPicPr>
